--- a/data/memories/memory_01/locales/es/documents/presentations/Presentation Q3 FINAL USE THIS.pptx
+++ b/data/memories/memory_01/locales/es/documents/presentations/Presentation Q3 FINAL USE THIS.pptx
@@ -3109,7 +3109,7 @@
           <a:lstStyle/>
           <a:p>
             <a:r>
-              <a:t>Q3 Executive Summary</a:t>
+              <a:t>Resumen ejecutivo del tercer trimestre</a:t>
             </a:r>
           </a:p>
         </p:txBody>
@@ -3133,7 +3133,7 @@
               <a:defRPr sz="2200"/>
             </a:pPr>
             <a:r>
-              <a:t>Quarter completed according to strategic objectives.</a:t>
+              <a:t>Trimestre cumplido según objetivos estratégicos.</a:t>
             </a:r>
           </a:p>
           <a:p>
@@ -3141,7 +3141,7 @@
               <a:defRPr sz="2200"/>
             </a:pPr>
             <a:r>
-              <a:t>Operational improvements successfully implemented.</a:t>
+              <a:t>Mejoras operativas implementadas con éxito.</a:t>
             </a:r>
           </a:p>
         </p:txBody>
@@ -3180,7 +3180,7 @@
           <a:lstStyle/>
           <a:p>
             <a:r>
-              <a:t>Financial Performance</a:t>
+              <a:t>Desempeño financiero</a:t>
             </a:r>
           </a:p>
         </p:txBody>
@@ -3204,7 +3204,7 @@
               <a:defRPr sz="2200"/>
             </a:pPr>
             <a:r>
-              <a:t>Budget objectives achieved.</a:t>
+              <a:t>Objetivos presupuestarios alcanzados.</a:t>
             </a:r>
           </a:p>
           <a:p>
@@ -3212,7 +3212,7 @@
               <a:defRPr sz="2200"/>
             </a:pPr>
             <a:r>
-              <a:t>Resource allocation adjusted where necessary.</a:t>
+              <a:t>Asignación de recursos ajustada cuando sea necesario.</a:t>
             </a:r>
           </a:p>
           <a:p>
@@ -3220,7 +3220,7 @@
               <a:defRPr sz="2200"/>
             </a:pPr>
             <a:r>
-              <a:t>Future planning approved.</a:t>
+              <a:t>Planificación futura aprobada.</a:t>
             </a:r>
           </a:p>
         </p:txBody>
@@ -3259,7 +3259,7 @@
           <a:lstStyle/>
           <a:p>
             <a:r>
-              <a:t>Process Improvements</a:t>
+              <a:t>Mejoras de procesos</a:t>
             </a:r>
           </a:p>
         </p:txBody>
@@ -3283,7 +3283,7 @@
               <a:defRPr sz="2200"/>
             </a:pPr>
             <a:r>
-              <a:t>Document procedures updated.</a:t>
+              <a:t>Procedimientos documentales actualizados.</a:t>
             </a:r>
           </a:p>
           <a:p>
@@ -3291,7 +3291,7 @@
               <a:defRPr sz="2200"/>
             </a:pPr>
             <a:r>
-              <a:t>Internal workflows improved.</a:t>
+              <a:t>Se mejoraron los flujos de trabajo internos.</a:t>
             </a:r>
           </a:p>
           <a:p>
@@ -3299,7 +3299,7 @@
               <a:defRPr sz="2200"/>
             </a:pPr>
             <a:r>
-              <a:t>Archive digitisation progressing.</a:t>
+              <a:t>La digitalización de archivos avanza.</a:t>
             </a:r>
           </a:p>
         </p:txBody>
@@ -3338,7 +3338,7 @@
           <a:lstStyle/>
           <a:p>
             <a:r>
-              <a:t>Organisational Structure</a:t>
+              <a:t>Estructura organizacional</a:t>
             </a:r>
           </a:p>
         </p:txBody>
@@ -3362,7 +3362,7 @@
               <a:defRPr sz="2200"/>
             </a:pPr>
             <a:r>
-              <a:t>Current organisation model established.</a:t>
+              <a:t>Modelo de organización actual establecido.</a:t>
             </a:r>
           </a:p>
           <a:p>
@@ -3370,7 +3370,7 @@
               <a:defRPr sz="2200"/>
             </a:pPr>
             <a:r>
-              <a:t>Department responsibilities clarified.</a:t>
+              <a:t>Se aclararon las responsabilidades del departamento.</a:t>
             </a:r>
           </a:p>
           <a:p>
@@ -3378,7 +3378,7 @@
               <a:defRPr sz="2200"/>
             </a:pPr>
             <a:r>
-              <a:t>Historical documentation maintained separately.</a:t>
+              <a:t>Documentación histórica mantenida por separado.</a:t>
             </a:r>
           </a:p>
         </p:txBody>
@@ -3417,7 +3417,7 @@
           <a:lstStyle/>
           <a:p>
             <a:r>
-              <a:t>Future Actions</a:t>
+              <a:t>Acciones futuras</a:t>
             </a:r>
           </a:p>
         </p:txBody>
@@ -3441,7 +3441,7 @@
               <a:defRPr sz="2200"/>
             </a:pPr>
             <a:r>
-              <a:t>Complete archive transition.</a:t>
+              <a:t>Transición completa del archivo.</a:t>
             </a:r>
           </a:p>
           <a:p>
@@ -3449,7 +3449,7 @@
               <a:defRPr sz="2200"/>
             </a:pPr>
             <a:r>
-              <a:t>Maintain documentation standards.</a:t>
+              <a:t>Mantener los estándares de documentación.</a:t>
             </a:r>
           </a:p>
           <a:p>
@@ -3457,7 +3457,7 @@
               <a:defRPr sz="2200"/>
             </a:pPr>
             <a:r>
-              <a:t>Continue operational improvements.</a:t>
+              <a:t>Continuar con las mejoras operativas.</a:t>
             </a:r>
           </a:p>
         </p:txBody>
@@ -3496,7 +3496,7 @@
           <a:lstStyle/>
           <a:p>
             <a:r>
-              <a:t>Final Note</a:t>
+              <a:t>Nota final</a:t>
             </a:r>
           </a:p>
         </p:txBody>
@@ -3520,7 +3520,7 @@
               <a:defRPr sz="2200"/>
             </a:pPr>
             <a:r>
-              <a:t>This presentation represents the approved management communication version.</a:t>
+              <a:t>Esta presentación representa la versión aprobada de comunicación de gestión.</a:t>
             </a:r>
           </a:p>
           <a:p>
@@ -3528,7 +3528,7 @@
               <a:defRPr sz="2200"/>
             </a:pPr>
             <a:r>
-              <a:t>Previous drafts must remain archived.</a:t>
+              <a:t>Los borradores anteriores deben permanecer archivados.</a:t>
             </a:r>
           </a:p>
         </p:txBody>
